--- a/1-2-encoding/1-2-3-character-encoding/1-2-3-character-encoding-v6-2.pptx
+++ b/1-2-encoding/1-2-3-character-encoding/1-2-3-character-encoding-v6-2.pptx
@@ -11009,7 +11009,7 @@
       </p:sp>
       <p:pic>
         <p:nvPicPr>
-          <p:cNvPr id="5" name="Picture 4"/>
+          <p:cNvPr id="6" name="Picture 5" descr="ChatGPT Image Sep 27, 2026, 04_58_25 PM"/>
           <p:cNvPicPr>
             <a:picLocks noChangeAspect="1"/>
           </p:cNvPicPr>
@@ -11023,8 +11023,8 @@
         </p:blipFill>
         <p:spPr>
           <a:xfrm>
-            <a:off x="608330" y="1524000"/>
-            <a:ext cx="6457950" cy="3810000"/>
+            <a:off x="608330" y="1486535"/>
+            <a:ext cx="8531225" cy="4801870"/>
           </a:xfrm>
           <a:prstGeom prst="rect">
             <a:avLst/>
@@ -22546,6 +22546,30 @@
           </a:p>
         </p:txBody>
       </p:sp>
+      <p:pic>
+        <p:nvPicPr>
+          <p:cNvPr id="5" name="Picture 4" descr="ChatGPT Image Sep 27, 2026, 04_57_45 PM"/>
+          <p:cNvPicPr>
+            <a:picLocks noChangeAspect="1"/>
+          </p:cNvPicPr>
+          <p:nvPr/>
+        </p:nvPicPr>
+        <p:blipFill>
+          <a:blip r:embed="rId1"/>
+          <a:stretch>
+            <a:fillRect/>
+          </a:stretch>
+        </p:blipFill>
+        <p:spPr>
+          <a:xfrm>
+            <a:off x="674370" y="1485265"/>
+            <a:ext cx="8283575" cy="4662170"/>
+          </a:xfrm>
+          <a:prstGeom prst="rect">
+            <a:avLst/>
+          </a:prstGeom>
+        </p:spPr>
+      </p:pic>
     </p:spTree>
   </p:cSld>
   <p:clrMapOvr>
